--- a/sql/pictures.pptx
+++ b/sql/pictures.pptx
@@ -259,7 +259,7 @@
           <a:p>
             <a:fld id="{8C1E0B3C-E2C7-534D-971A-DFA71DA59DBD}" type="datetimeFigureOut">
               <a:rPr lang="en-US" smtClean="0"/>
-              <a:t>10/14/25</a:t>
+              <a:t>12/15/25</a:t>
             </a:fld>
             <a:endParaRPr lang="en-US"/>
           </a:p>
@@ -457,7 +457,7 @@
           <a:p>
             <a:fld id="{8C1E0B3C-E2C7-534D-971A-DFA71DA59DBD}" type="datetimeFigureOut">
               <a:rPr lang="en-US" smtClean="0"/>
-              <a:t>10/14/25</a:t>
+              <a:t>12/15/25</a:t>
             </a:fld>
             <a:endParaRPr lang="en-US"/>
           </a:p>
@@ -665,7 +665,7 @@
           <a:p>
             <a:fld id="{8C1E0B3C-E2C7-534D-971A-DFA71DA59DBD}" type="datetimeFigureOut">
               <a:rPr lang="en-US" smtClean="0"/>
-              <a:t>10/14/25</a:t>
+              <a:t>12/15/25</a:t>
             </a:fld>
             <a:endParaRPr lang="en-US"/>
           </a:p>
@@ -863,7 +863,7 @@
           <a:p>
             <a:fld id="{8C1E0B3C-E2C7-534D-971A-DFA71DA59DBD}" type="datetimeFigureOut">
               <a:rPr lang="en-US" smtClean="0"/>
-              <a:t>10/14/25</a:t>
+              <a:t>12/15/25</a:t>
             </a:fld>
             <a:endParaRPr lang="en-US"/>
           </a:p>
@@ -1138,7 +1138,7 @@
           <a:p>
             <a:fld id="{8C1E0B3C-E2C7-534D-971A-DFA71DA59DBD}" type="datetimeFigureOut">
               <a:rPr lang="en-US" smtClean="0"/>
-              <a:t>10/14/25</a:t>
+              <a:t>12/15/25</a:t>
             </a:fld>
             <a:endParaRPr lang="en-US"/>
           </a:p>
@@ -1403,7 +1403,7 @@
           <a:p>
             <a:fld id="{8C1E0B3C-E2C7-534D-971A-DFA71DA59DBD}" type="datetimeFigureOut">
               <a:rPr lang="en-US" smtClean="0"/>
-              <a:t>10/14/25</a:t>
+              <a:t>12/15/25</a:t>
             </a:fld>
             <a:endParaRPr lang="en-US"/>
           </a:p>
@@ -1815,7 +1815,7 @@
           <a:p>
             <a:fld id="{8C1E0B3C-E2C7-534D-971A-DFA71DA59DBD}" type="datetimeFigureOut">
               <a:rPr lang="en-US" smtClean="0"/>
-              <a:t>10/14/25</a:t>
+              <a:t>12/15/25</a:t>
             </a:fld>
             <a:endParaRPr lang="en-US"/>
           </a:p>
@@ -1956,7 +1956,7 @@
           <a:p>
             <a:fld id="{8C1E0B3C-E2C7-534D-971A-DFA71DA59DBD}" type="datetimeFigureOut">
               <a:rPr lang="en-US" smtClean="0"/>
-              <a:t>10/14/25</a:t>
+              <a:t>12/15/25</a:t>
             </a:fld>
             <a:endParaRPr lang="en-US"/>
           </a:p>
@@ -2069,7 +2069,7 @@
           <a:p>
             <a:fld id="{8C1E0B3C-E2C7-534D-971A-DFA71DA59DBD}" type="datetimeFigureOut">
               <a:rPr lang="en-US" smtClean="0"/>
-              <a:t>10/14/25</a:t>
+              <a:t>12/15/25</a:t>
             </a:fld>
             <a:endParaRPr lang="en-US"/>
           </a:p>
@@ -2380,7 +2380,7 @@
           <a:p>
             <a:fld id="{8C1E0B3C-E2C7-534D-971A-DFA71DA59DBD}" type="datetimeFigureOut">
               <a:rPr lang="en-US" smtClean="0"/>
-              <a:t>10/14/25</a:t>
+              <a:t>12/15/25</a:t>
             </a:fld>
             <a:endParaRPr lang="en-US"/>
           </a:p>
@@ -2668,7 +2668,7 @@
           <a:p>
             <a:fld id="{8C1E0B3C-E2C7-534D-971A-DFA71DA59DBD}" type="datetimeFigureOut">
               <a:rPr lang="en-US" smtClean="0"/>
-              <a:t>10/14/25</a:t>
+              <a:t>12/15/25</a:t>
             </a:fld>
             <a:endParaRPr lang="en-US"/>
           </a:p>
@@ -2909,7 +2909,7 @@
           <a:p>
             <a:fld id="{8C1E0B3C-E2C7-534D-971A-DFA71DA59DBD}" type="datetimeFigureOut">
               <a:rPr lang="en-US" smtClean="0"/>
-              <a:t>10/14/25</a:t>
+              <a:t>12/15/25</a:t>
             </a:fld>
             <a:endParaRPr lang="en-US"/>
           </a:p>
@@ -4016,6 +4016,121 @@
           </a:prstGeom>
         </p:spPr>
       </p:pic>
+      <p:pic>
+        <p:nvPicPr>
+          <p:cNvPr id="2" name="Picture 1">
+            <a:extLst>
+              <a:ext uri="{FF2B5EF4-FFF2-40B4-BE49-F238E27FC236}">
+                <a16:creationId xmlns:a16="http://schemas.microsoft.com/office/drawing/2014/main" id="{780C9618-041C-B5CF-7428-2DDB68888C7E}"/>
+              </a:ext>
+            </a:extLst>
+          </p:cNvPr>
+          <p:cNvPicPr>
+            <a:picLocks noChangeAspect="1"/>
+          </p:cNvPicPr>
+          <p:nvPr/>
+        </p:nvPicPr>
+        <p:blipFill>
+          <a:blip r:embed="rId3"/>
+          <a:stretch>
+            <a:fillRect/>
+          </a:stretch>
+        </p:blipFill>
+        <p:spPr>
+          <a:xfrm>
+            <a:off x="6825596" y="3944989"/>
+            <a:ext cx="1094648" cy="566641"/>
+          </a:xfrm>
+          <a:prstGeom prst="rect">
+            <a:avLst/>
+          </a:prstGeom>
+        </p:spPr>
+      </p:pic>
+      <p:pic>
+        <p:nvPicPr>
+          <p:cNvPr id="13" name="Picture 12">
+            <a:extLst>
+              <a:ext uri="{FF2B5EF4-FFF2-40B4-BE49-F238E27FC236}">
+                <a16:creationId xmlns:a16="http://schemas.microsoft.com/office/drawing/2014/main" id="{A20FC51F-0B57-27D9-CBEC-D4B73CFAF57C}"/>
+              </a:ext>
+            </a:extLst>
+          </p:cNvPr>
+          <p:cNvPicPr>
+            <a:picLocks noChangeAspect="1"/>
+          </p:cNvPicPr>
+          <p:nvPr/>
+        </p:nvPicPr>
+        <p:blipFill>
+          <a:blip r:embed="rId3"/>
+          <a:stretch>
+            <a:fillRect/>
+          </a:stretch>
+        </p:blipFill>
+        <p:spPr>
+          <a:xfrm>
+            <a:off x="8615686" y="3944989"/>
+            <a:ext cx="1094648" cy="566641"/>
+          </a:xfrm>
+          <a:prstGeom prst="rect">
+            <a:avLst/>
+          </a:prstGeom>
+        </p:spPr>
+      </p:pic>
+      <p:sp>
+        <p:nvSpPr>
+          <p:cNvPr id="21" name="Right Arrow 20">
+            <a:extLst>
+              <a:ext uri="{FF2B5EF4-FFF2-40B4-BE49-F238E27FC236}">
+                <a16:creationId xmlns:a16="http://schemas.microsoft.com/office/drawing/2014/main" id="{8395C39A-1AA1-E044-CD65-8E4716AF1B53}"/>
+              </a:ext>
+            </a:extLst>
+          </p:cNvPr>
+          <p:cNvSpPr/>
+          <p:nvPr/>
+        </p:nvSpPr>
+        <p:spPr>
+          <a:xfrm>
+            <a:off x="8025846" y="4096267"/>
+            <a:ext cx="490588" cy="240089"/>
+          </a:xfrm>
+          <a:prstGeom prst="rightArrow">
+            <a:avLst>
+              <a:gd name="adj1" fmla="val 50000"/>
+              <a:gd name="adj2" fmla="val 104933"/>
+            </a:avLst>
+          </a:prstGeom>
+          <a:solidFill>
+            <a:srgbClr val="1287B1"/>
+          </a:solidFill>
+          <a:ln>
+            <a:noFill/>
+          </a:ln>
+        </p:spPr>
+        <p:style>
+          <a:lnRef idx="2">
+            <a:schemeClr val="accent1">
+              <a:shade val="15000"/>
+            </a:schemeClr>
+          </a:lnRef>
+          <a:fillRef idx="1">
+            <a:schemeClr val="accent1"/>
+          </a:fillRef>
+          <a:effectRef idx="0">
+            <a:schemeClr val="accent1"/>
+          </a:effectRef>
+          <a:fontRef idx="minor">
+            <a:schemeClr val="lt1"/>
+          </a:fontRef>
+        </p:style>
+        <p:txBody>
+          <a:bodyPr rtlCol="0" anchor="ctr"/>
+          <a:lstStyle/>
+          <a:p>
+            <a:pPr algn="ctr"/>
+            <a:endParaRPr lang="en-US"/>
+          </a:p>
+        </p:txBody>
+      </p:sp>
     </p:spTree>
     <p:extLst>
       <p:ext uri="{BB962C8B-B14F-4D97-AF65-F5344CB8AC3E}">

--- a/sql/pictures.pptx
+++ b/sql/pictures.pptx
@@ -259,7 +259,7 @@
           <a:p>
             <a:fld id="{8C1E0B3C-E2C7-534D-971A-DFA71DA59DBD}" type="datetimeFigureOut">
               <a:rPr lang="en-US" smtClean="0"/>
-              <a:t>12/15/25</a:t>
+              <a:t>2/16/26</a:t>
             </a:fld>
             <a:endParaRPr lang="en-US"/>
           </a:p>
@@ -457,7 +457,7 @@
           <a:p>
             <a:fld id="{8C1E0B3C-E2C7-534D-971A-DFA71DA59DBD}" type="datetimeFigureOut">
               <a:rPr lang="en-US" smtClean="0"/>
-              <a:t>12/15/25</a:t>
+              <a:t>2/16/26</a:t>
             </a:fld>
             <a:endParaRPr lang="en-US"/>
           </a:p>
@@ -665,7 +665,7 @@
           <a:p>
             <a:fld id="{8C1E0B3C-E2C7-534D-971A-DFA71DA59DBD}" type="datetimeFigureOut">
               <a:rPr lang="en-US" smtClean="0"/>
-              <a:t>12/15/25</a:t>
+              <a:t>2/16/26</a:t>
             </a:fld>
             <a:endParaRPr lang="en-US"/>
           </a:p>
@@ -863,7 +863,7 @@
           <a:p>
             <a:fld id="{8C1E0B3C-E2C7-534D-971A-DFA71DA59DBD}" type="datetimeFigureOut">
               <a:rPr lang="en-US" smtClean="0"/>
-              <a:t>12/15/25</a:t>
+              <a:t>2/16/26</a:t>
             </a:fld>
             <a:endParaRPr lang="en-US"/>
           </a:p>
@@ -1138,7 +1138,7 @@
           <a:p>
             <a:fld id="{8C1E0B3C-E2C7-534D-971A-DFA71DA59DBD}" type="datetimeFigureOut">
               <a:rPr lang="en-US" smtClean="0"/>
-              <a:t>12/15/25</a:t>
+              <a:t>2/16/26</a:t>
             </a:fld>
             <a:endParaRPr lang="en-US"/>
           </a:p>
@@ -1403,7 +1403,7 @@
           <a:p>
             <a:fld id="{8C1E0B3C-E2C7-534D-971A-DFA71DA59DBD}" type="datetimeFigureOut">
               <a:rPr lang="en-US" smtClean="0"/>
-              <a:t>12/15/25</a:t>
+              <a:t>2/16/26</a:t>
             </a:fld>
             <a:endParaRPr lang="en-US"/>
           </a:p>
@@ -1815,7 +1815,7 @@
           <a:p>
             <a:fld id="{8C1E0B3C-E2C7-534D-971A-DFA71DA59DBD}" type="datetimeFigureOut">
               <a:rPr lang="en-US" smtClean="0"/>
-              <a:t>12/15/25</a:t>
+              <a:t>2/16/26</a:t>
             </a:fld>
             <a:endParaRPr lang="en-US"/>
           </a:p>
@@ -1956,7 +1956,7 @@
           <a:p>
             <a:fld id="{8C1E0B3C-E2C7-534D-971A-DFA71DA59DBD}" type="datetimeFigureOut">
               <a:rPr lang="en-US" smtClean="0"/>
-              <a:t>12/15/25</a:t>
+              <a:t>2/16/26</a:t>
             </a:fld>
             <a:endParaRPr lang="en-US"/>
           </a:p>
@@ -2069,7 +2069,7 @@
           <a:p>
             <a:fld id="{8C1E0B3C-E2C7-534D-971A-DFA71DA59DBD}" type="datetimeFigureOut">
               <a:rPr lang="en-US" smtClean="0"/>
-              <a:t>12/15/25</a:t>
+              <a:t>2/16/26</a:t>
             </a:fld>
             <a:endParaRPr lang="en-US"/>
           </a:p>
@@ -2380,7 +2380,7 @@
           <a:p>
             <a:fld id="{8C1E0B3C-E2C7-534D-971A-DFA71DA59DBD}" type="datetimeFigureOut">
               <a:rPr lang="en-US" smtClean="0"/>
-              <a:t>12/15/25</a:t>
+              <a:t>2/16/26</a:t>
             </a:fld>
             <a:endParaRPr lang="en-US"/>
           </a:p>
@@ -2668,7 +2668,7 @@
           <a:p>
             <a:fld id="{8C1E0B3C-E2C7-534D-971A-DFA71DA59DBD}" type="datetimeFigureOut">
               <a:rPr lang="en-US" smtClean="0"/>
-              <a:t>12/15/25</a:t>
+              <a:t>2/16/26</a:t>
             </a:fld>
             <a:endParaRPr lang="en-US"/>
           </a:p>
@@ -2909,7 +2909,7 @@
           <a:p>
             <a:fld id="{8C1E0B3C-E2C7-534D-971A-DFA71DA59DBD}" type="datetimeFigureOut">
               <a:rPr lang="en-US" smtClean="0"/>
-              <a:t>12/15/25</a:t>
+              <a:t>2/16/26</a:t>
             </a:fld>
             <a:endParaRPr lang="en-US"/>
           </a:p>
@@ -4131,6 +4131,121 @@
           </a:p>
         </p:txBody>
       </p:sp>
+      <p:pic>
+        <p:nvPicPr>
+          <p:cNvPr id="23" name="Picture 22">
+            <a:extLst>
+              <a:ext uri="{FF2B5EF4-FFF2-40B4-BE49-F238E27FC236}">
+                <a16:creationId xmlns:a16="http://schemas.microsoft.com/office/drawing/2014/main" id="{5D05EB50-21B7-D774-8FC4-43881F744D53}"/>
+              </a:ext>
+            </a:extLst>
+          </p:cNvPr>
+          <p:cNvPicPr>
+            <a:picLocks noChangeAspect="1"/>
+          </p:cNvPicPr>
+          <p:nvPr/>
+        </p:nvPicPr>
+        <p:blipFill>
+          <a:blip r:embed="rId3"/>
+          <a:stretch>
+            <a:fillRect/>
+          </a:stretch>
+        </p:blipFill>
+        <p:spPr>
+          <a:xfrm>
+            <a:off x="6759451" y="5007543"/>
+            <a:ext cx="1094648" cy="566641"/>
+          </a:xfrm>
+          <a:prstGeom prst="rect">
+            <a:avLst/>
+          </a:prstGeom>
+        </p:spPr>
+      </p:pic>
+      <p:sp>
+        <p:nvSpPr>
+          <p:cNvPr id="25" name="Right Arrow 24">
+            <a:extLst>
+              <a:ext uri="{FF2B5EF4-FFF2-40B4-BE49-F238E27FC236}">
+                <a16:creationId xmlns:a16="http://schemas.microsoft.com/office/drawing/2014/main" id="{30227AA0-F8F8-0534-45D9-08494B8ADE27}"/>
+              </a:ext>
+            </a:extLst>
+          </p:cNvPr>
+          <p:cNvSpPr/>
+          <p:nvPr/>
+        </p:nvSpPr>
+        <p:spPr>
+          <a:xfrm>
+            <a:off x="7959701" y="5158821"/>
+            <a:ext cx="490588" cy="240089"/>
+          </a:xfrm>
+          <a:prstGeom prst="rightArrow">
+            <a:avLst>
+              <a:gd name="adj1" fmla="val 50000"/>
+              <a:gd name="adj2" fmla="val 104933"/>
+            </a:avLst>
+          </a:prstGeom>
+          <a:solidFill>
+            <a:srgbClr val="1287B1"/>
+          </a:solidFill>
+          <a:ln>
+            <a:noFill/>
+          </a:ln>
+        </p:spPr>
+        <p:style>
+          <a:lnRef idx="2">
+            <a:schemeClr val="accent1">
+              <a:shade val="15000"/>
+            </a:schemeClr>
+          </a:lnRef>
+          <a:fillRef idx="1">
+            <a:schemeClr val="accent1"/>
+          </a:fillRef>
+          <a:effectRef idx="0">
+            <a:schemeClr val="accent1"/>
+          </a:effectRef>
+          <a:fontRef idx="minor">
+            <a:schemeClr val="lt1"/>
+          </a:fontRef>
+        </p:style>
+        <p:txBody>
+          <a:bodyPr rtlCol="0" anchor="ctr"/>
+          <a:lstStyle/>
+          <a:p>
+            <a:pPr algn="ctr"/>
+            <a:endParaRPr lang="en-US"/>
+          </a:p>
+        </p:txBody>
+      </p:sp>
+      <p:pic>
+        <p:nvPicPr>
+          <p:cNvPr id="26" name="Picture 25">
+            <a:extLst>
+              <a:ext uri="{FF2B5EF4-FFF2-40B4-BE49-F238E27FC236}">
+                <a16:creationId xmlns:a16="http://schemas.microsoft.com/office/drawing/2014/main" id="{F8734051-726A-88B1-4E0C-4B47CC6CEC5D}"/>
+              </a:ext>
+            </a:extLst>
+          </p:cNvPr>
+          <p:cNvPicPr>
+            <a:picLocks noChangeAspect="1"/>
+          </p:cNvPicPr>
+          <p:nvPr/>
+        </p:nvPicPr>
+        <p:blipFill>
+          <a:blip r:embed="rId4"/>
+          <a:stretch>
+            <a:fillRect/>
+          </a:stretch>
+        </p:blipFill>
+        <p:spPr>
+          <a:xfrm>
+            <a:off x="8494872" y="4637693"/>
+            <a:ext cx="1336276" cy="1348101"/>
+          </a:xfrm>
+          <a:prstGeom prst="rect">
+            <a:avLst/>
+          </a:prstGeom>
+        </p:spPr>
+      </p:pic>
     </p:spTree>
     <p:extLst>
       <p:ext uri="{BB962C8B-B14F-4D97-AF65-F5344CB8AC3E}">

--- a/sql/pictures.pptx
+++ b/sql/pictures.pptx
@@ -259,7 +259,7 @@
           <a:p>
             <a:fld id="{8C1E0B3C-E2C7-534D-971A-DFA71DA59DBD}" type="datetimeFigureOut">
               <a:rPr lang="en-US" smtClean="0"/>
-              <a:t>2/16/26</a:t>
+              <a:t>5/13/26</a:t>
             </a:fld>
             <a:endParaRPr lang="en-US"/>
           </a:p>
@@ -457,7 +457,7 @@
           <a:p>
             <a:fld id="{8C1E0B3C-E2C7-534D-971A-DFA71DA59DBD}" type="datetimeFigureOut">
               <a:rPr lang="en-US" smtClean="0"/>
-              <a:t>2/16/26</a:t>
+              <a:t>5/13/26</a:t>
             </a:fld>
             <a:endParaRPr lang="en-US"/>
           </a:p>
@@ -665,7 +665,7 @@
           <a:p>
             <a:fld id="{8C1E0B3C-E2C7-534D-971A-DFA71DA59DBD}" type="datetimeFigureOut">
               <a:rPr lang="en-US" smtClean="0"/>
-              <a:t>2/16/26</a:t>
+              <a:t>5/13/26</a:t>
             </a:fld>
             <a:endParaRPr lang="en-US"/>
           </a:p>
@@ -863,7 +863,7 @@
           <a:p>
             <a:fld id="{8C1E0B3C-E2C7-534D-971A-DFA71DA59DBD}" type="datetimeFigureOut">
               <a:rPr lang="en-US" smtClean="0"/>
-              <a:t>2/16/26</a:t>
+              <a:t>5/13/26</a:t>
             </a:fld>
             <a:endParaRPr lang="en-US"/>
           </a:p>
@@ -1138,7 +1138,7 @@
           <a:p>
             <a:fld id="{8C1E0B3C-E2C7-534D-971A-DFA71DA59DBD}" type="datetimeFigureOut">
               <a:rPr lang="en-US" smtClean="0"/>
-              <a:t>2/16/26</a:t>
+              <a:t>5/13/26</a:t>
             </a:fld>
             <a:endParaRPr lang="en-US"/>
           </a:p>
@@ -1403,7 +1403,7 @@
           <a:p>
             <a:fld id="{8C1E0B3C-E2C7-534D-971A-DFA71DA59DBD}" type="datetimeFigureOut">
               <a:rPr lang="en-US" smtClean="0"/>
-              <a:t>2/16/26</a:t>
+              <a:t>5/13/26</a:t>
             </a:fld>
             <a:endParaRPr lang="en-US"/>
           </a:p>
@@ -1815,7 +1815,7 @@
           <a:p>
             <a:fld id="{8C1E0B3C-E2C7-534D-971A-DFA71DA59DBD}" type="datetimeFigureOut">
               <a:rPr lang="en-US" smtClean="0"/>
-              <a:t>2/16/26</a:t>
+              <a:t>5/13/26</a:t>
             </a:fld>
             <a:endParaRPr lang="en-US"/>
           </a:p>
@@ -1956,7 +1956,7 @@
           <a:p>
             <a:fld id="{8C1E0B3C-E2C7-534D-971A-DFA71DA59DBD}" type="datetimeFigureOut">
               <a:rPr lang="en-US" smtClean="0"/>
-              <a:t>2/16/26</a:t>
+              <a:t>5/13/26</a:t>
             </a:fld>
             <a:endParaRPr lang="en-US"/>
           </a:p>
@@ -2069,7 +2069,7 @@
           <a:p>
             <a:fld id="{8C1E0B3C-E2C7-534D-971A-DFA71DA59DBD}" type="datetimeFigureOut">
               <a:rPr lang="en-US" smtClean="0"/>
-              <a:t>2/16/26</a:t>
+              <a:t>5/13/26</a:t>
             </a:fld>
             <a:endParaRPr lang="en-US"/>
           </a:p>
@@ -2380,7 +2380,7 @@
           <a:p>
             <a:fld id="{8C1E0B3C-E2C7-534D-971A-DFA71DA59DBD}" type="datetimeFigureOut">
               <a:rPr lang="en-US" smtClean="0"/>
-              <a:t>2/16/26</a:t>
+              <a:t>5/13/26</a:t>
             </a:fld>
             <a:endParaRPr lang="en-US"/>
           </a:p>
@@ -2668,7 +2668,7 @@
           <a:p>
             <a:fld id="{8C1E0B3C-E2C7-534D-971A-DFA71DA59DBD}" type="datetimeFigureOut">
               <a:rPr lang="en-US" smtClean="0"/>
-              <a:t>2/16/26</a:t>
+              <a:t>5/13/26</a:t>
             </a:fld>
             <a:endParaRPr lang="en-US"/>
           </a:p>
@@ -2909,7 +2909,7 @@
           <a:p>
             <a:fld id="{8C1E0B3C-E2C7-534D-971A-DFA71DA59DBD}" type="datetimeFigureOut">
               <a:rPr lang="en-US" smtClean="0"/>
-              <a:t>2/16/26</a:t>
+              <a:t>5/13/26</a:t>
             </a:fld>
             <a:endParaRPr lang="en-US"/>
           </a:p>
@@ -3348,7 +3348,7 @@
         </p:blipFill>
         <p:spPr>
           <a:xfrm>
-            <a:off x="1605044" y="710283"/>
+            <a:off x="259135" y="710283"/>
             <a:ext cx="1270131" cy="1270131"/>
           </a:xfrm>
           <a:prstGeom prst="rect">
@@ -3378,7 +3378,7 @@
         </p:blipFill>
         <p:spPr>
           <a:xfrm>
-            <a:off x="3642492" y="1054784"/>
+            <a:off x="2296583" y="1054784"/>
             <a:ext cx="1094648" cy="566641"/>
           </a:xfrm>
           <a:prstGeom prst="rect">
@@ -3408,7 +3408,7 @@
         </p:blipFill>
         <p:spPr>
           <a:xfrm>
-            <a:off x="3591244" y="2158345"/>
+            <a:off x="2245335" y="2158345"/>
             <a:ext cx="1336276" cy="1348101"/>
           </a:xfrm>
           <a:prstGeom prst="rect">
@@ -3438,7 +3438,7 @@
         </p:blipFill>
         <p:spPr>
           <a:xfrm>
-            <a:off x="1615145" y="2186626"/>
+            <a:off x="269236" y="2186626"/>
             <a:ext cx="1270131" cy="1270131"/>
           </a:xfrm>
           <a:prstGeom prst="rect">
@@ -3468,7 +3468,7 @@
         </p:blipFill>
         <p:spPr>
           <a:xfrm>
-            <a:off x="1605044" y="3666045"/>
+            <a:off x="259135" y="3666045"/>
             <a:ext cx="1336276" cy="1348101"/>
           </a:xfrm>
           <a:prstGeom prst="rect">
@@ -3498,7 +3498,7 @@
         </p:blipFill>
         <p:spPr>
           <a:xfrm>
-            <a:off x="3731037" y="3666045"/>
+            <a:off x="2385128" y="3666045"/>
             <a:ext cx="1336276" cy="1348101"/>
           </a:xfrm>
           <a:prstGeom prst="rect">
@@ -3528,7 +3528,7 @@
         </p:blipFill>
         <p:spPr>
           <a:xfrm>
-            <a:off x="1582072" y="5014146"/>
+            <a:off x="236163" y="5014146"/>
             <a:ext cx="1336276" cy="1348101"/>
           </a:xfrm>
           <a:prstGeom prst="rect">
@@ -3558,7 +3558,7 @@
         </p:blipFill>
         <p:spPr>
           <a:xfrm>
-            <a:off x="8614161" y="710282"/>
+            <a:off x="5963437" y="710282"/>
             <a:ext cx="1270131" cy="1260436"/>
           </a:xfrm>
           <a:prstGeom prst="rect">
@@ -3588,7 +3588,7 @@
         </p:blipFill>
         <p:spPr>
           <a:xfrm>
-            <a:off x="6583968" y="710281"/>
+            <a:off x="3933244" y="710281"/>
             <a:ext cx="1270131" cy="1270131"/>
           </a:xfrm>
           <a:prstGeom prst="rect">
@@ -3618,7 +3618,7 @@
         </p:blipFill>
         <p:spPr>
           <a:xfrm>
-            <a:off x="6583968" y="2166494"/>
+            <a:off x="3933244" y="2166494"/>
             <a:ext cx="1336276" cy="1348101"/>
           </a:xfrm>
           <a:prstGeom prst="rect">
@@ -3648,7 +3648,7 @@
         </p:blipFill>
         <p:spPr>
           <a:xfrm>
-            <a:off x="8661295" y="2147640"/>
+            <a:off x="6010571" y="2147640"/>
             <a:ext cx="1270131" cy="1260436"/>
           </a:xfrm>
           <a:prstGeom prst="rect">
@@ -3670,7 +3670,7 @@
         </p:nvSpPr>
         <p:spPr>
           <a:xfrm>
-            <a:off x="2930645" y="1213852"/>
+            <a:off x="1584736" y="1213852"/>
             <a:ext cx="633071" cy="306634"/>
           </a:xfrm>
           <a:prstGeom prst="rightArrow">
@@ -3725,7 +3725,7 @@
         </p:nvSpPr>
         <p:spPr>
           <a:xfrm>
-            <a:off x="2959746" y="2684207"/>
+            <a:off x="1613837" y="2684207"/>
             <a:ext cx="633071" cy="306634"/>
           </a:xfrm>
           <a:prstGeom prst="rightArrow">
@@ -3780,7 +3780,7 @@
         </p:nvSpPr>
         <p:spPr>
           <a:xfrm>
-            <a:off x="7932875" y="1223279"/>
+            <a:off x="5282151" y="1223279"/>
             <a:ext cx="633071" cy="306634"/>
           </a:xfrm>
           <a:prstGeom prst="rightArrow">
@@ -3835,7 +3835,7 @@
         </p:nvSpPr>
         <p:spPr>
           <a:xfrm>
-            <a:off x="7974234" y="2624541"/>
+            <a:off x="5323510" y="2624541"/>
             <a:ext cx="633071" cy="306634"/>
           </a:xfrm>
           <a:prstGeom prst="rightArrow">
@@ -3890,7 +3890,7 @@
         </p:nvSpPr>
         <p:spPr>
           <a:xfrm>
-            <a:off x="3055396" y="4163989"/>
+            <a:off x="1709487" y="4163989"/>
             <a:ext cx="633071" cy="306634"/>
           </a:xfrm>
           <a:prstGeom prst="rightArrow">
@@ -3945,7 +3945,7 @@
         </p:nvSpPr>
         <p:spPr>
           <a:xfrm>
-            <a:off x="2980505" y="5574184"/>
+            <a:off x="1634596" y="5574184"/>
             <a:ext cx="633071" cy="306634"/>
           </a:xfrm>
           <a:prstGeom prst="rightArrow">
@@ -4008,7 +4008,7 @@
         </p:blipFill>
         <p:spPr>
           <a:xfrm>
-            <a:off x="3712058" y="5404875"/>
+            <a:off x="2366149" y="5404875"/>
             <a:ext cx="1094648" cy="566641"/>
           </a:xfrm>
           <a:prstGeom prst="rect">
@@ -4038,7 +4038,7 @@
         </p:blipFill>
         <p:spPr>
           <a:xfrm>
-            <a:off x="6825596" y="3944989"/>
+            <a:off x="4174872" y="3944989"/>
             <a:ext cx="1094648" cy="566641"/>
           </a:xfrm>
           <a:prstGeom prst="rect">
@@ -4068,7 +4068,7 @@
         </p:blipFill>
         <p:spPr>
           <a:xfrm>
-            <a:off x="8615686" y="3944989"/>
+            <a:off x="5964962" y="3944989"/>
             <a:ext cx="1094648" cy="566641"/>
           </a:xfrm>
           <a:prstGeom prst="rect">
@@ -4090,7 +4090,7 @@
         </p:nvSpPr>
         <p:spPr>
           <a:xfrm>
-            <a:off x="8025846" y="4096267"/>
+            <a:off x="5375122" y="4096267"/>
             <a:ext cx="490588" cy="240089"/>
           </a:xfrm>
           <a:prstGeom prst="rightArrow">
@@ -4153,7 +4153,7 @@
         </p:blipFill>
         <p:spPr>
           <a:xfrm>
-            <a:off x="6759451" y="5007543"/>
+            <a:off x="4108727" y="5007543"/>
             <a:ext cx="1094648" cy="566641"/>
           </a:xfrm>
           <a:prstGeom prst="rect">
@@ -4175,7 +4175,7 @@
         </p:nvSpPr>
         <p:spPr>
           <a:xfrm>
-            <a:off x="7959701" y="5158821"/>
+            <a:off x="5308977" y="5158821"/>
             <a:ext cx="490588" cy="240089"/>
           </a:xfrm>
           <a:prstGeom prst="rightArrow">
@@ -4238,7 +4238,139 @@
         </p:blipFill>
         <p:spPr>
           <a:xfrm>
-            <a:off x="8494872" y="4637693"/>
+            <a:off x="5844148" y="4637693"/>
+            <a:ext cx="1336276" cy="1348101"/>
+          </a:xfrm>
+          <a:prstGeom prst="rect">
+            <a:avLst/>
+          </a:prstGeom>
+        </p:spPr>
+      </p:pic>
+      <p:pic>
+        <p:nvPicPr>
+          <p:cNvPr id="1026" name="Picture 2" descr="Microsoft sql server Icons, Logos, Symbols – Free Download ...">
+            <a:extLst>
+              <a:ext uri="{FF2B5EF4-FFF2-40B4-BE49-F238E27FC236}">
+                <a16:creationId xmlns:a16="http://schemas.microsoft.com/office/drawing/2014/main" id="{ADD5DC63-D8E1-D72E-A3CE-5117E36DCE60}"/>
+              </a:ext>
+            </a:extLst>
+          </p:cNvPr>
+          <p:cNvPicPr>
+            <a:picLocks noChangeAspect="1" noChangeArrowheads="1"/>
+          </p:cNvPicPr>
+          <p:nvPr/>
+        </p:nvPicPr>
+        <p:blipFill>
+          <a:blip r:embed="rId6">
+            <a:extLst>
+              <a:ext uri="{28A0092B-C50C-407E-A947-70E740481C1C}">
+                <a14:useLocalDpi xmlns:a14="http://schemas.microsoft.com/office/drawing/2010/main" val="0"/>
+              </a:ext>
+            </a:extLst>
+          </a:blip>
+          <a:srcRect/>
+          <a:stretch>
+            <a:fillRect/>
+          </a:stretch>
+        </p:blipFill>
+        <p:spPr bwMode="auto">
+          <a:xfrm>
+            <a:off x="7783530" y="632311"/>
+            <a:ext cx="1401567" cy="1401567"/>
+          </a:xfrm>
+          <a:prstGeom prst="rect">
+            <a:avLst/>
+          </a:prstGeom>
+          <a:noFill/>
+          <a:extLst>
+            <a:ext uri="{909E8E84-426E-40DD-AFC4-6F175D3DCCD1}">
+              <a14:hiddenFill xmlns:a14="http://schemas.microsoft.com/office/drawing/2010/main">
+                <a:solidFill>
+                  <a:srgbClr val="FFFFFF"/>
+                </a:solidFill>
+              </a14:hiddenFill>
+            </a:ext>
+          </a:extLst>
+        </p:spPr>
+      </p:pic>
+      <p:sp>
+        <p:nvSpPr>
+          <p:cNvPr id="24" name="Right Arrow 23">
+            <a:extLst>
+              <a:ext uri="{FF2B5EF4-FFF2-40B4-BE49-F238E27FC236}">
+                <a16:creationId xmlns:a16="http://schemas.microsoft.com/office/drawing/2014/main" id="{6FF97ACD-DFFC-471E-C4FF-B27E108C6DBF}"/>
+              </a:ext>
+            </a:extLst>
+          </p:cNvPr>
+          <p:cNvSpPr/>
+          <p:nvPr/>
+        </p:nvSpPr>
+        <p:spPr>
+          <a:xfrm>
+            <a:off x="9248677" y="1143745"/>
+            <a:ext cx="490588" cy="240089"/>
+          </a:xfrm>
+          <a:prstGeom prst="rightArrow">
+            <a:avLst>
+              <a:gd name="adj1" fmla="val 50000"/>
+              <a:gd name="adj2" fmla="val 104933"/>
+            </a:avLst>
+          </a:prstGeom>
+          <a:solidFill>
+            <a:srgbClr val="B61C1B"/>
+          </a:solidFill>
+          <a:ln>
+            <a:noFill/>
+          </a:ln>
+        </p:spPr>
+        <p:style>
+          <a:lnRef idx="2">
+            <a:schemeClr val="accent1">
+              <a:shade val="15000"/>
+            </a:schemeClr>
+          </a:lnRef>
+          <a:fillRef idx="1">
+            <a:schemeClr val="accent1"/>
+          </a:fillRef>
+          <a:effectRef idx="0">
+            <a:schemeClr val="accent1"/>
+          </a:effectRef>
+          <a:fontRef idx="minor">
+            <a:schemeClr val="lt1"/>
+          </a:fontRef>
+        </p:style>
+        <p:txBody>
+          <a:bodyPr rtlCol="0" anchor="ctr"/>
+          <a:lstStyle/>
+          <a:p>
+            <a:pPr algn="ctr"/>
+            <a:endParaRPr lang="en-US"/>
+          </a:p>
+        </p:txBody>
+      </p:sp>
+      <p:pic>
+        <p:nvPicPr>
+          <p:cNvPr id="27" name="Picture 26">
+            <a:extLst>
+              <a:ext uri="{FF2B5EF4-FFF2-40B4-BE49-F238E27FC236}">
+                <a16:creationId xmlns:a16="http://schemas.microsoft.com/office/drawing/2014/main" id="{D9EAE755-236B-9572-55FA-96CD8CDECB16}"/>
+              </a:ext>
+            </a:extLst>
+          </p:cNvPr>
+          <p:cNvPicPr>
+            <a:picLocks noChangeAspect="1"/>
+          </p:cNvPicPr>
+          <p:nvPr/>
+        </p:nvPicPr>
+        <p:blipFill>
+          <a:blip r:embed="rId4"/>
+          <a:stretch>
+            <a:fillRect/>
+          </a:stretch>
+        </p:blipFill>
+        <p:spPr>
+          <a:xfrm>
+            <a:off x="9783848" y="622617"/>
             <a:ext cx="1336276" cy="1348101"/>
           </a:xfrm>
           <a:prstGeom prst="rect">
